--- a/딥러닝_산출물_웨이퍼_v4.pptx
+++ b/딥러닝_산출물_웨이퍼_v4.pptx
@@ -25,6 +25,7 @@
     <p:sldId id="270" r:id="rId20"/>
     <p:sldId id="271" r:id="rId21"/>
     <p:sldId id="272" r:id="rId22"/>
+    <p:sldId id="273" r:id="rId23"/>
   </p:sldIdLst>
   <p:sldSz cy="6858000" cx="12191675"/>
   <p:notesSz cx="6858000" cy="12191675"/>
@@ -273,7 +274,7 @@
       </p15:sldGuideLst>
     </p:ext>
     <p:ext uri="GoogleSlidesCustomDataVersion2">
-      <go:slidesCustomData xmlns:go="http://customooxmlschemas.google.com/" r:id="rId23" roundtripDataSignature="AMtx7miRDYgQgtnpJdnMfUruMt9bbainBg=="/>
+      <go:slidesCustomData xmlns:go="http://customooxmlschemas.google.com/" r:id="rId24" roundtripDataSignature="AMtx7mh7Ag22kdjw6H+HhsLZjl+CZo89UA=="/>
     </p:ext>
   </p:extLst>
 </p:presentation>
@@ -2722,7 +2723,7 @@
       </p:grpSpPr>
       <p:sp>
         <p:nvSpPr>
-          <p:cNvPr id="530" name="Google Shape;530;p18:notes"/>
+          <p:cNvPr id="530" name="Google Shape;530;g3f2dbbdcfeb_0_0:notes"/>
           <p:cNvSpPr/>
           <p:nvPr>
             <p:ph idx="2" type="sldImg"/>
@@ -2767,7 +2768,7 @@
       </p:sp>
       <p:sp>
         <p:nvSpPr>
-          <p:cNvPr id="531" name="Google Shape;531;p18:notes"/>
+          <p:cNvPr id="531" name="Google Shape;531;g3f2dbbdcfeb_0_0:notes"/>
           <p:cNvSpPr txBox="1"/>
           <p:nvPr>
             <p:ph idx="1" type="body"/>
@@ -2776,7 +2777,7 @@
         <p:spPr>
           <a:xfrm>
             <a:off x="685800" y="4400550"/>
-            <a:ext cx="5486400" cy="3600450"/>
+            <a:ext cx="5486400" cy="3600600"/>
           </a:xfrm>
           <a:prstGeom prst="rect">
             <a:avLst/>
@@ -2810,7 +2811,164 @@
       </p:sp>
       <p:sp>
         <p:nvSpPr>
-          <p:cNvPr id="532" name="Google Shape;532;p18:notes"/>
+          <p:cNvPr id="532" name="Google Shape;532;g3f2dbbdcfeb_0_0:notes"/>
+          <p:cNvSpPr txBox="1"/>
+          <p:nvPr>
+            <p:ph idx="12" type="sldNum"/>
+          </p:nvPr>
+        </p:nvSpPr>
+        <p:spPr>
+          <a:xfrm>
+            <a:off x="3884613" y="8685213"/>
+            <a:ext cx="2971800" cy="458700"/>
+          </a:xfrm>
+          <a:prstGeom prst="rect">
+            <a:avLst/>
+          </a:prstGeom>
+          <a:noFill/>
+          <a:ln>
+            <a:noFill/>
+          </a:ln>
+        </p:spPr>
+        <p:txBody>
+          <a:bodyPr anchorCtr="0" anchor="b" bIns="45700" lIns="91425" spcFirstLastPara="1" rIns="91425" wrap="square" tIns="45700">
+            <a:noAutofit/>
+          </a:bodyPr>
+          <a:lstStyle/>
+          <a:p>
+            <a:pPr indent="0" lvl="0" marL="0" rtl="0" algn="r">
+              <a:spcBef>
+                <a:spcPts val="0"/>
+              </a:spcBef>
+              <a:spcAft>
+                <a:spcPts val="0"/>
+              </a:spcAft>
+              <a:buNone/>
+            </a:pPr>
+            <a:fld id="{00000000-1234-1234-1234-123412341234}" type="slidenum">
+              <a:rPr lang="en-US"/>
+              <a:t>‹#›</a:t>
+            </a:fld>
+            <a:endParaRPr/>
+          </a:p>
+        </p:txBody>
+      </p:sp>
+    </p:spTree>
+  </p:cSld>
+  <p:clrMapOvr>
+    <a:masterClrMapping/>
+  </p:clrMapOvr>
+</p:notes>
+</file>
+
+<file path=ppt/notesSlides/notesSlide18.xml><?xml version="1.0" encoding="utf-8"?>
+<p:notes xmlns:a="http://schemas.openxmlformats.org/drawingml/2006/main" xmlns:r="http://schemas.openxmlformats.org/officeDocument/2006/relationships" xmlns:mc="http://schemas.openxmlformats.org/markup-compatibility/2006" xmlns:mv="urn:schemas-microsoft-com:mac:vml" xmlns:p="http://schemas.openxmlformats.org/presentationml/2006/main" xmlns:c="http://schemas.openxmlformats.org/drawingml/2006/chart" xmlns:dgm="http://schemas.openxmlformats.org/drawingml/2006/diagram" xmlns:o="urn:schemas-microsoft-com:office:office" xmlns:v="urn:schemas-microsoft-com:vml" xmlns:pvml="urn:schemas-microsoft-com:office:powerpoint" xmlns:com="http://schemas.openxmlformats.org/drawingml/2006/compatibility" xmlns:p14="http://schemas.microsoft.com/office/powerpoint/2010/main" xmlns:p15="http://schemas.microsoft.com/office/powerpoint/2012/main" xmlns:ahyp="http://schemas.microsoft.com/office/drawing/2018/hyperlinkcolor" showMasterPhAnim="0" showMasterSp="0">
+  <p:cSld>
+    <p:spTree>
+      <p:nvGrpSpPr>
+        <p:cNvPr id="559" name="Shape 559"/>
+        <p:cNvGrpSpPr/>
+        <p:nvPr/>
+      </p:nvGrpSpPr>
+      <p:grpSpPr>
+        <a:xfrm>
+          <a:off x="0" y="0"/>
+          <a:ext cx="0" cy="0"/>
+          <a:chOff x="0" y="0"/>
+          <a:chExt cx="0" cy="0"/>
+        </a:xfrm>
+      </p:grpSpPr>
+      <p:sp>
+        <p:nvSpPr>
+          <p:cNvPr id="560" name="Google Shape;560;p18:notes"/>
+          <p:cNvSpPr/>
+          <p:nvPr>
+            <p:ph idx="2" type="sldImg"/>
+          </p:nvPr>
+        </p:nvSpPr>
+        <p:spPr>
+          <a:xfrm>
+            <a:off x="685800" y="1143000"/>
+            <a:ext cx="5486400" cy="3086100"/>
+          </a:xfrm>
+          <a:custGeom>
+            <a:rect b="b" l="l" r="r" t="t"/>
+            <a:pathLst>
+              <a:path extrusionOk="0" h="120000" w="120000">
+                <a:moveTo>
+                  <a:pt x="0" y="0"/>
+                </a:moveTo>
+                <a:lnTo>
+                  <a:pt x="120000" y="0"/>
+                </a:lnTo>
+                <a:lnTo>
+                  <a:pt x="120000" y="120000"/>
+                </a:lnTo>
+                <a:lnTo>
+                  <a:pt x="0" y="120000"/>
+                </a:lnTo>
+                <a:close/>
+              </a:path>
+            </a:pathLst>
+          </a:custGeom>
+          <a:noFill/>
+          <a:ln cap="flat" cmpd="sng" w="12700">
+            <a:solidFill>
+              <a:srgbClr val="000000"/>
+            </a:solidFill>
+            <a:prstDash val="solid"/>
+            <a:round/>
+            <a:headEnd len="sm" w="sm" type="none"/>
+            <a:tailEnd len="sm" w="sm" type="none"/>
+          </a:ln>
+        </p:spPr>
+      </p:sp>
+      <p:sp>
+        <p:nvSpPr>
+          <p:cNvPr id="561" name="Google Shape;561;p18:notes"/>
+          <p:cNvSpPr txBox="1"/>
+          <p:nvPr>
+            <p:ph idx="1" type="body"/>
+          </p:nvPr>
+        </p:nvSpPr>
+        <p:spPr>
+          <a:xfrm>
+            <a:off x="685800" y="4400550"/>
+            <a:ext cx="5486400" cy="3600450"/>
+          </a:xfrm>
+          <a:prstGeom prst="rect">
+            <a:avLst/>
+          </a:prstGeom>
+          <a:noFill/>
+          <a:ln>
+            <a:noFill/>
+          </a:ln>
+        </p:spPr>
+        <p:txBody>
+          <a:bodyPr anchorCtr="0" anchor="t" bIns="45700" lIns="91425" spcFirstLastPara="1" rIns="91425" wrap="square" tIns="45700">
+            <a:noAutofit/>
+          </a:bodyPr>
+          <a:lstStyle/>
+          <a:p>
+            <a:pPr indent="0" lvl="0" marL="0" rtl="0" algn="l">
+              <a:spcBef>
+                <a:spcPts val="0"/>
+              </a:spcBef>
+              <a:spcAft>
+                <a:spcPts val="0"/>
+              </a:spcAft>
+              <a:buNone/>
+            </a:pPr>
+            <a:r>
+              <a:t/>
+            </a:r>
+            <a:endParaRPr/>
+          </a:p>
+        </p:txBody>
+      </p:sp>
+      <p:sp>
+        <p:nvSpPr>
+          <p:cNvPr id="562" name="Google Shape;562;p18:notes"/>
           <p:cNvSpPr txBox="1"/>
           <p:nvPr>
             <p:ph idx="12" type="sldNum"/>
@@ -6867,7 +7025,31 @@
                 <a:cs typeface="Malgun Gothic"/>
                 <a:sym typeface="Malgun Gothic"/>
               </a:rPr>
-              <a:t>recall 단일 지표가 아닌 Macro-F1 기준으로 최적점 탐색</a:t>
+              <a:t>recall 단일 지표가 아닌 Macro-F1/</a:t>
+            </a:r>
+            <a:r>
+              <a:rPr lang="en-US" sz="1250">
+                <a:solidFill>
+                  <a:srgbClr val="D7E5F2"/>
+                </a:solidFill>
+                <a:latin typeface="Malgun Gothic"/>
+                <a:ea typeface="Malgun Gothic"/>
+                <a:cs typeface="Malgun Gothic"/>
+                <a:sym typeface="Malgun Gothic"/>
+              </a:rPr>
+              <a:t>Macro-Precision</a:t>
+            </a:r>
+            <a:r>
+              <a:rPr b="0" i="0" lang="en-US" sz="1250" u="none" cap="none" strike="noStrike">
+                <a:solidFill>
+                  <a:srgbClr val="D7E5F2"/>
+                </a:solidFill>
+                <a:latin typeface="Malgun Gothic"/>
+                <a:ea typeface="Malgun Gothic"/>
+                <a:cs typeface="Malgun Gothic"/>
+                <a:sym typeface="Malgun Gothic"/>
+              </a:rPr>
+              <a:t> 기준으로 최적점 탐색</a:t>
             </a:r>
             <a:endParaRPr b="0" i="0" sz="1250" u="none" cap="none" strike="noStrike">
               <a:solidFill>
@@ -12890,7 +13072,7 @@
               <a:buNone/>
             </a:pPr>
             <a:r>
-              <a:rPr b="1" i="0" lang="en-US" sz="1600" u="none" cap="none" strike="noStrike">
+              <a:rPr b="1" lang="en-US" sz="1600">
                 <a:solidFill>
                   <a:srgbClr val="6FE4F5"/>
                 </a:solidFill>
@@ -13379,7 +13561,1490 @@
       </p:grpSpPr>
       <p:sp>
         <p:nvSpPr>
-          <p:cNvPr id="534" name="Google Shape;534;p18"/>
+          <p:cNvPr id="534" name="Google Shape;534;g3f2dbbdcfeb_0_0"/>
+          <p:cNvSpPr/>
+          <p:nvPr/>
+        </p:nvSpPr>
+        <p:spPr>
+          <a:xfrm>
+            <a:off x="-1828800" y="-2743200"/>
+            <a:ext cx="6400800" cy="6400800"/>
+          </a:xfrm>
+          <a:prstGeom prst="ellipse">
+            <a:avLst/>
+          </a:prstGeom>
+          <a:solidFill>
+            <a:srgbClr val="0E2138">
+              <a:alpha val="45100"/>
+            </a:srgbClr>
+          </a:solidFill>
+          <a:ln>
+            <a:noFill/>
+          </a:ln>
+        </p:spPr>
+        <p:txBody>
+          <a:bodyPr anchorCtr="0" anchor="ctr" bIns="91425" lIns="91425" spcFirstLastPara="1" rIns="91425" wrap="square" tIns="91425">
+            <a:noAutofit/>
+          </a:bodyPr>
+          <a:lstStyle/>
+          <a:p>
+            <a:pPr indent="0" lvl="0" marL="0" rtl="0" algn="l">
+              <a:spcBef>
+                <a:spcPts val="0"/>
+              </a:spcBef>
+              <a:spcAft>
+                <a:spcPts val="0"/>
+              </a:spcAft>
+              <a:buNone/>
+            </a:pPr>
+            <a:r>
+              <a:t/>
+            </a:r>
+            <a:endParaRPr/>
+          </a:p>
+        </p:txBody>
+      </p:sp>
+      <p:sp>
+        <p:nvSpPr>
+          <p:cNvPr id="535" name="Google Shape;535;g3f2dbbdcfeb_0_0"/>
+          <p:cNvSpPr/>
+          <p:nvPr/>
+        </p:nvSpPr>
+        <p:spPr>
+          <a:xfrm>
+            <a:off x="8229600" y="3657600"/>
+            <a:ext cx="7315200" cy="7315200"/>
+          </a:xfrm>
+          <a:prstGeom prst="ellipse">
+            <a:avLst/>
+          </a:prstGeom>
+          <a:solidFill>
+            <a:srgbClr val="0E2138">
+              <a:alpha val="40000"/>
+            </a:srgbClr>
+          </a:solidFill>
+          <a:ln>
+            <a:noFill/>
+          </a:ln>
+        </p:spPr>
+        <p:txBody>
+          <a:bodyPr anchorCtr="0" anchor="ctr" bIns="91425" lIns="91425" spcFirstLastPara="1" rIns="91425" wrap="square" tIns="91425">
+            <a:noAutofit/>
+          </a:bodyPr>
+          <a:lstStyle/>
+          <a:p>
+            <a:pPr indent="0" lvl="0" marL="0" rtl="0" algn="l">
+              <a:spcBef>
+                <a:spcPts val="0"/>
+              </a:spcBef>
+              <a:spcAft>
+                <a:spcPts val="0"/>
+              </a:spcAft>
+              <a:buNone/>
+            </a:pPr>
+            <a:r>
+              <a:t/>
+            </a:r>
+            <a:endParaRPr/>
+          </a:p>
+        </p:txBody>
+      </p:sp>
+      <p:cxnSp>
+        <p:nvCxnSpPr>
+          <p:cNvPr id="536" name="Google Shape;536;g3f2dbbdcfeb_0_0"/>
+          <p:cNvCxnSpPr/>
+          <p:nvPr/>
+        </p:nvCxnSpPr>
+        <p:spPr>
+          <a:xfrm>
+            <a:off x="10058400" y="0"/>
+            <a:ext cx="0" cy="640200"/>
+          </a:xfrm>
+          <a:prstGeom prst="straightConnector1">
+            <a:avLst/>
+          </a:prstGeom>
+          <a:noFill/>
+          <a:ln cap="flat" cmpd="sng" w="12700">
+            <a:solidFill>
+              <a:srgbClr val="27D3EE">
+                <a:alpha val="27840"/>
+              </a:srgbClr>
+            </a:solidFill>
+            <a:prstDash val="solid"/>
+            <a:round/>
+            <a:headEnd len="sm" w="sm" type="none"/>
+            <a:tailEnd len="sm" w="sm" type="none"/>
+          </a:ln>
+        </p:spPr>
+      </p:cxnSp>
+      <p:cxnSp>
+        <p:nvCxnSpPr>
+          <p:cNvPr id="537" name="Google Shape;537;g3f2dbbdcfeb_0_0"/>
+          <p:cNvCxnSpPr/>
+          <p:nvPr/>
+        </p:nvCxnSpPr>
+        <p:spPr>
+          <a:xfrm>
+            <a:off x="10058400" y="640080"/>
+            <a:ext cx="1280100" cy="0"/>
+          </a:xfrm>
+          <a:prstGeom prst="straightConnector1">
+            <a:avLst/>
+          </a:prstGeom>
+          <a:noFill/>
+          <a:ln cap="flat" cmpd="sng" w="12700">
+            <a:solidFill>
+              <a:srgbClr val="27D3EE">
+                <a:alpha val="27840"/>
+              </a:srgbClr>
+            </a:solidFill>
+            <a:prstDash val="solid"/>
+            <a:round/>
+            <a:headEnd len="sm" w="sm" type="none"/>
+            <a:tailEnd len="sm" w="sm" type="none"/>
+          </a:ln>
+        </p:spPr>
+      </p:cxnSp>
+      <p:sp>
+        <p:nvSpPr>
+          <p:cNvPr id="538" name="Google Shape;538;g3f2dbbdcfeb_0_0"/>
+          <p:cNvSpPr/>
+          <p:nvPr/>
+        </p:nvSpPr>
+        <p:spPr>
+          <a:xfrm>
+            <a:off x="11301984" y="566928"/>
+            <a:ext cx="146400" cy="146400"/>
+          </a:xfrm>
+          <a:prstGeom prst="ellipse">
+            <a:avLst/>
+          </a:prstGeom>
+          <a:solidFill>
+            <a:srgbClr val="27D3EE">
+              <a:alpha val="60000"/>
+            </a:srgbClr>
+          </a:solidFill>
+          <a:ln cap="flat" cmpd="sng" w="9525">
+            <a:solidFill>
+              <a:srgbClr val="27D3EE">
+                <a:alpha val="70200"/>
+              </a:srgbClr>
+            </a:solidFill>
+            <a:prstDash val="solid"/>
+            <a:round/>
+            <a:headEnd len="sm" w="sm" type="none"/>
+            <a:tailEnd len="sm" w="sm" type="none"/>
+          </a:ln>
+        </p:spPr>
+        <p:txBody>
+          <a:bodyPr anchorCtr="0" anchor="ctr" bIns="91425" lIns="91425" spcFirstLastPara="1" rIns="91425" wrap="square" tIns="91425">
+            <a:noAutofit/>
+          </a:bodyPr>
+          <a:lstStyle/>
+          <a:p>
+            <a:pPr indent="0" lvl="0" marL="0" rtl="0" algn="l">
+              <a:spcBef>
+                <a:spcPts val="0"/>
+              </a:spcBef>
+              <a:spcAft>
+                <a:spcPts val="0"/>
+              </a:spcAft>
+              <a:buNone/>
+            </a:pPr>
+            <a:r>
+              <a:t/>
+            </a:r>
+            <a:endParaRPr/>
+          </a:p>
+        </p:txBody>
+      </p:sp>
+      <p:cxnSp>
+        <p:nvCxnSpPr>
+          <p:cNvPr id="539" name="Google Shape;539;g3f2dbbdcfeb_0_0"/>
+          <p:cNvCxnSpPr/>
+          <p:nvPr/>
+        </p:nvCxnSpPr>
+        <p:spPr>
+          <a:xfrm>
+            <a:off x="11155680" y="228600"/>
+            <a:ext cx="0" cy="914400"/>
+          </a:xfrm>
+          <a:prstGeom prst="straightConnector1">
+            <a:avLst/>
+          </a:prstGeom>
+          <a:noFill/>
+          <a:ln cap="flat" cmpd="sng" w="12700">
+            <a:solidFill>
+              <a:srgbClr val="27D3EE">
+                <a:alpha val="20000"/>
+              </a:srgbClr>
+            </a:solidFill>
+            <a:prstDash val="solid"/>
+            <a:round/>
+            <a:headEnd len="sm" w="sm" type="none"/>
+            <a:tailEnd len="sm" w="sm" type="none"/>
+          </a:ln>
+        </p:spPr>
+      </p:cxnSp>
+      <p:cxnSp>
+        <p:nvCxnSpPr>
+          <p:cNvPr id="540" name="Google Shape;540;g3f2dbbdcfeb_0_0"/>
+          <p:cNvCxnSpPr/>
+          <p:nvPr/>
+        </p:nvCxnSpPr>
+        <p:spPr>
+          <a:xfrm>
+            <a:off x="0" y="6400800"/>
+            <a:ext cx="1005900" cy="0"/>
+          </a:xfrm>
+          <a:prstGeom prst="straightConnector1">
+            <a:avLst/>
+          </a:prstGeom>
+          <a:noFill/>
+          <a:ln cap="flat" cmpd="sng" w="12700">
+            <a:solidFill>
+              <a:srgbClr val="27D3EE">
+                <a:alpha val="27840"/>
+              </a:srgbClr>
+            </a:solidFill>
+            <a:prstDash val="solid"/>
+            <a:round/>
+            <a:headEnd len="sm" w="sm" type="none"/>
+            <a:tailEnd len="sm" w="sm" type="none"/>
+          </a:ln>
+        </p:spPr>
+      </p:cxnSp>
+      <p:cxnSp>
+        <p:nvCxnSpPr>
+          <p:cNvPr id="541" name="Google Shape;541;g3f2dbbdcfeb_0_0"/>
+          <p:cNvCxnSpPr/>
+          <p:nvPr/>
+        </p:nvCxnSpPr>
+        <p:spPr>
+          <a:xfrm>
+            <a:off x="1005840" y="6400800"/>
+            <a:ext cx="0" cy="457200"/>
+          </a:xfrm>
+          <a:prstGeom prst="straightConnector1">
+            <a:avLst/>
+          </a:prstGeom>
+          <a:noFill/>
+          <a:ln cap="flat" cmpd="sng" w="12700">
+            <a:solidFill>
+              <a:srgbClr val="27D3EE">
+                <a:alpha val="27840"/>
+              </a:srgbClr>
+            </a:solidFill>
+            <a:prstDash val="solid"/>
+            <a:round/>
+            <a:headEnd len="sm" w="sm" type="none"/>
+            <a:tailEnd len="sm" w="sm" type="none"/>
+          </a:ln>
+        </p:spPr>
+      </p:cxnSp>
+      <p:sp>
+        <p:nvSpPr>
+          <p:cNvPr id="542" name="Google Shape;542;g3f2dbbdcfeb_0_0"/>
+          <p:cNvSpPr/>
+          <p:nvPr/>
+        </p:nvSpPr>
+        <p:spPr>
+          <a:xfrm>
+            <a:off x="932688" y="5989320"/>
+            <a:ext cx="146400" cy="146400"/>
+          </a:xfrm>
+          <a:prstGeom prst="ellipse">
+            <a:avLst/>
+          </a:prstGeom>
+          <a:solidFill>
+            <a:srgbClr val="27D3EE">
+              <a:alpha val="60000"/>
+            </a:srgbClr>
+          </a:solidFill>
+          <a:ln cap="flat" cmpd="sng" w="9525">
+            <a:solidFill>
+              <a:srgbClr val="27D3EE">
+                <a:alpha val="70200"/>
+              </a:srgbClr>
+            </a:solidFill>
+            <a:prstDash val="solid"/>
+            <a:round/>
+            <a:headEnd len="sm" w="sm" type="none"/>
+            <a:tailEnd len="sm" w="sm" type="none"/>
+          </a:ln>
+        </p:spPr>
+        <p:txBody>
+          <a:bodyPr anchorCtr="0" anchor="ctr" bIns="91425" lIns="91425" spcFirstLastPara="1" rIns="91425" wrap="square" tIns="91425">
+            <a:noAutofit/>
+          </a:bodyPr>
+          <a:lstStyle/>
+          <a:p>
+            <a:pPr indent="0" lvl="0" marL="0" rtl="0" algn="l">
+              <a:spcBef>
+                <a:spcPts val="0"/>
+              </a:spcBef>
+              <a:spcAft>
+                <a:spcPts val="0"/>
+              </a:spcAft>
+              <a:buNone/>
+            </a:pPr>
+            <a:r>
+              <a:t/>
+            </a:r>
+            <a:endParaRPr/>
+          </a:p>
+        </p:txBody>
+      </p:sp>
+      <p:sp>
+        <p:nvSpPr>
+          <p:cNvPr id="543" name="Google Shape;543;g3f2dbbdcfeb_0_0"/>
+          <p:cNvSpPr/>
+          <p:nvPr/>
+        </p:nvSpPr>
+        <p:spPr>
+          <a:xfrm>
+            <a:off x="548640" y="502920"/>
+            <a:ext cx="109800" cy="713100"/>
+          </a:xfrm>
+          <a:prstGeom prst="roundRect">
+            <a:avLst>
+              <a:gd fmla="val 41667" name="adj"/>
+            </a:avLst>
+          </a:prstGeom>
+          <a:solidFill>
+            <a:srgbClr val="27D3EE"/>
+          </a:solidFill>
+          <a:ln>
+            <a:noFill/>
+          </a:ln>
+        </p:spPr>
+        <p:txBody>
+          <a:bodyPr anchorCtr="0" anchor="ctr" bIns="91425" lIns="91425" spcFirstLastPara="1" rIns="91425" wrap="square" tIns="91425">
+            <a:noAutofit/>
+          </a:bodyPr>
+          <a:lstStyle/>
+          <a:p>
+            <a:pPr indent="0" lvl="0" marL="0" rtl="0" algn="l">
+              <a:spcBef>
+                <a:spcPts val="0"/>
+              </a:spcBef>
+              <a:spcAft>
+                <a:spcPts val="0"/>
+              </a:spcAft>
+              <a:buNone/>
+            </a:pPr>
+            <a:r>
+              <a:t/>
+            </a:r>
+            <a:endParaRPr/>
+          </a:p>
+        </p:txBody>
+      </p:sp>
+      <p:sp>
+        <p:nvSpPr>
+          <p:cNvPr id="544" name="Google Shape;544;g3f2dbbdcfeb_0_0"/>
+          <p:cNvSpPr/>
+          <p:nvPr/>
+        </p:nvSpPr>
+        <p:spPr>
+          <a:xfrm>
+            <a:off x="777240" y="457200"/>
+            <a:ext cx="10058400" cy="292500"/>
+          </a:xfrm>
+          <a:prstGeom prst="rect">
+            <a:avLst/>
+          </a:prstGeom>
+          <a:noFill/>
+          <a:ln>
+            <a:noFill/>
+          </a:ln>
+        </p:spPr>
+        <p:txBody>
+          <a:bodyPr anchorCtr="0" anchor="ctr" bIns="45700" lIns="91425" spcFirstLastPara="1" rIns="91425" wrap="square" tIns="45700">
+            <a:noAutofit/>
+          </a:bodyPr>
+          <a:lstStyle/>
+          <a:p>
+            <a:pPr indent="0" lvl="0" marL="0" marR="0" rtl="0" algn="l">
+              <a:spcBef>
+                <a:spcPts val="0"/>
+              </a:spcBef>
+              <a:spcAft>
+                <a:spcPts val="0"/>
+              </a:spcAft>
+              <a:buClr>
+                <a:srgbClr val="3FB6E0"/>
+              </a:buClr>
+              <a:buSzPts val="1200"/>
+              <a:buFont typeface="Malgun Gothic"/>
+              <a:buNone/>
+            </a:pPr>
+            <a:r>
+              <a:rPr b="1" i="0" lang="en-US" sz="1200" u="none" cap="none" strike="noStrike">
+                <a:solidFill>
+                  <a:srgbClr val="3FB6E0"/>
+                </a:solidFill>
+                <a:latin typeface="Malgun Gothic"/>
+                <a:ea typeface="Malgun Gothic"/>
+                <a:cs typeface="Malgun Gothic"/>
+                <a:sym typeface="Malgun Gothic"/>
+              </a:rPr>
+              <a:t>0</a:t>
+            </a:r>
+            <a:r>
+              <a:rPr b="1" lang="en-US" sz="1200">
+                <a:solidFill>
+                  <a:srgbClr val="3FB6E0"/>
+                </a:solidFill>
+                <a:latin typeface="Malgun Gothic"/>
+                <a:ea typeface="Malgun Gothic"/>
+                <a:cs typeface="Malgun Gothic"/>
+                <a:sym typeface="Malgun Gothic"/>
+              </a:rPr>
+              <a:t>9</a:t>
+            </a:r>
+            <a:r>
+              <a:rPr b="1" i="0" lang="en-US" sz="1200" u="none" cap="none" strike="noStrike">
+                <a:solidFill>
+                  <a:srgbClr val="3FB6E0"/>
+                </a:solidFill>
+                <a:latin typeface="Malgun Gothic"/>
+                <a:ea typeface="Malgun Gothic"/>
+                <a:cs typeface="Malgun Gothic"/>
+                <a:sym typeface="Malgun Gothic"/>
+              </a:rPr>
+              <a:t>  </a:t>
+            </a:r>
+            <a:r>
+              <a:rPr b="1" lang="en-US" sz="1200">
+                <a:solidFill>
+                  <a:srgbClr val="3FB6E0"/>
+                </a:solidFill>
+                <a:latin typeface="Malgun Gothic"/>
+                <a:ea typeface="Malgun Gothic"/>
+                <a:cs typeface="Malgun Gothic"/>
+                <a:sym typeface="Malgun Gothic"/>
+              </a:rPr>
+              <a:t>Q&amp;A</a:t>
+            </a:r>
+            <a:endParaRPr b="0" i="0" sz="1200" u="none" cap="none" strike="noStrike">
+              <a:solidFill>
+                <a:schemeClr val="dk1"/>
+              </a:solidFill>
+              <a:latin typeface="Calibri"/>
+              <a:ea typeface="Calibri"/>
+              <a:cs typeface="Calibri"/>
+              <a:sym typeface="Calibri"/>
+            </a:endParaRPr>
+          </a:p>
+        </p:txBody>
+      </p:sp>
+      <p:sp>
+        <p:nvSpPr>
+          <p:cNvPr id="545" name="Google Shape;545;g3f2dbbdcfeb_0_0"/>
+          <p:cNvSpPr/>
+          <p:nvPr/>
+        </p:nvSpPr>
+        <p:spPr>
+          <a:xfrm>
+            <a:off x="758952" y="731520"/>
+            <a:ext cx="10789800" cy="567000"/>
+          </a:xfrm>
+          <a:prstGeom prst="rect">
+            <a:avLst/>
+          </a:prstGeom>
+          <a:noFill/>
+          <a:ln>
+            <a:noFill/>
+          </a:ln>
+        </p:spPr>
+        <p:txBody>
+          <a:bodyPr anchorCtr="0" anchor="ctr" bIns="45700" lIns="91425" spcFirstLastPara="1" rIns="91425" wrap="square" tIns="45700">
+            <a:noAutofit/>
+          </a:bodyPr>
+          <a:lstStyle/>
+          <a:p>
+            <a:pPr indent="0" lvl="0" marL="0" marR="0" rtl="0" algn="l">
+              <a:spcBef>
+                <a:spcPts val="0"/>
+              </a:spcBef>
+              <a:spcAft>
+                <a:spcPts val="0"/>
+              </a:spcAft>
+              <a:buClr>
+                <a:srgbClr val="F5FAFF"/>
+              </a:buClr>
+              <a:buSzPts val="2900"/>
+              <a:buFont typeface="Malgun Gothic"/>
+              <a:buNone/>
+            </a:pPr>
+            <a:r>
+              <a:rPr b="1" lang="en-US" sz="2900">
+                <a:solidFill>
+                  <a:srgbClr val="F5FAFF"/>
+                </a:solidFill>
+                <a:latin typeface="Malgun Gothic"/>
+                <a:ea typeface="Malgun Gothic"/>
+                <a:cs typeface="Malgun Gothic"/>
+                <a:sym typeface="Malgun Gothic"/>
+              </a:rPr>
+              <a:t>Trouble Shooting</a:t>
+            </a:r>
+            <a:endParaRPr b="0" i="0" sz="2900" u="none" cap="none" strike="noStrike">
+              <a:solidFill>
+                <a:schemeClr val="dk1"/>
+              </a:solidFill>
+              <a:latin typeface="Calibri"/>
+              <a:ea typeface="Calibri"/>
+              <a:cs typeface="Calibri"/>
+              <a:sym typeface="Calibri"/>
+            </a:endParaRPr>
+          </a:p>
+        </p:txBody>
+      </p:sp>
+      <p:sp>
+        <p:nvSpPr>
+          <p:cNvPr id="546" name="Google Shape;546;g3f2dbbdcfeb_0_0"/>
+          <p:cNvSpPr/>
+          <p:nvPr/>
+        </p:nvSpPr>
+        <p:spPr>
+          <a:xfrm>
+            <a:off x="914400" y="2468880"/>
+            <a:ext cx="4846200" cy="822900"/>
+          </a:xfrm>
+          <a:prstGeom prst="rect">
+            <a:avLst/>
+          </a:prstGeom>
+          <a:noFill/>
+          <a:ln>
+            <a:noFill/>
+          </a:ln>
+        </p:spPr>
+        <p:txBody>
+          <a:bodyPr anchorCtr="0" anchor="ctr" bIns="45700" lIns="91425" spcFirstLastPara="1" rIns="91425" wrap="square" tIns="45700">
+            <a:noAutofit/>
+          </a:bodyPr>
+          <a:lstStyle/>
+          <a:p>
+            <a:pPr indent="0" lvl="0" marL="0" marR="0" rtl="0" algn="l">
+              <a:lnSpc>
+                <a:spcPct val="120000"/>
+              </a:lnSpc>
+              <a:spcBef>
+                <a:spcPts val="0"/>
+              </a:spcBef>
+              <a:spcAft>
+                <a:spcPts val="0"/>
+              </a:spcAft>
+              <a:buClr>
+                <a:srgbClr val="9FB6CE"/>
+              </a:buClr>
+              <a:buSzPts val="1250"/>
+              <a:buFont typeface="Malgun Gothic"/>
+              <a:buNone/>
+            </a:pPr>
+            <a:r>
+              <a:rPr lang="en-US" sz="1250">
+                <a:solidFill>
+                  <a:srgbClr val="9FB6CE"/>
+                </a:solidFill>
+                <a:latin typeface="Malgun Gothic"/>
+                <a:ea typeface="Malgun Gothic"/>
+                <a:cs typeface="Malgun Gothic"/>
+                <a:sym typeface="Malgun Gothic"/>
+              </a:rPr>
+              <a:t>원인 : RandomZoom 사용시 웨이퍼의 가장자리가 잘리는 이슈</a:t>
+            </a:r>
+            <a:endParaRPr sz="1250">
+              <a:solidFill>
+                <a:srgbClr val="9FB6CE"/>
+              </a:solidFill>
+              <a:latin typeface="Malgun Gothic"/>
+              <a:ea typeface="Malgun Gothic"/>
+              <a:cs typeface="Malgun Gothic"/>
+              <a:sym typeface="Malgun Gothic"/>
+            </a:endParaRPr>
+          </a:p>
+          <a:p>
+            <a:pPr indent="0" lvl="0" marL="0" marR="0" rtl="0" algn="l">
+              <a:lnSpc>
+                <a:spcPct val="120000"/>
+              </a:lnSpc>
+              <a:spcBef>
+                <a:spcPts val="0"/>
+              </a:spcBef>
+              <a:spcAft>
+                <a:spcPts val="0"/>
+              </a:spcAft>
+              <a:buClr>
+                <a:srgbClr val="9FB6CE"/>
+              </a:buClr>
+              <a:buSzPts val="1250"/>
+              <a:buFont typeface="Malgun Gothic"/>
+              <a:buNone/>
+            </a:pPr>
+            <a:r>
+              <a:rPr lang="en-US" sz="1250">
+                <a:solidFill>
+                  <a:srgbClr val="9FB6CE"/>
+                </a:solidFill>
+                <a:latin typeface="Malgun Gothic"/>
+                <a:ea typeface="Malgun Gothic"/>
+                <a:cs typeface="Malgun Gothic"/>
+                <a:sym typeface="Malgun Gothic"/>
+              </a:rPr>
+              <a:t>해결 : RandomRotation(0.1), RandomFlip만 사용</a:t>
+            </a:r>
+            <a:endParaRPr sz="1250">
+              <a:solidFill>
+                <a:srgbClr val="9FB6CE"/>
+              </a:solidFill>
+              <a:latin typeface="Malgun Gothic"/>
+              <a:ea typeface="Malgun Gothic"/>
+              <a:cs typeface="Malgun Gothic"/>
+              <a:sym typeface="Malgun Gothic"/>
+            </a:endParaRPr>
+          </a:p>
+        </p:txBody>
+      </p:sp>
+      <p:sp>
+        <p:nvSpPr>
+          <p:cNvPr id="547" name="Google Shape;547;g3f2dbbdcfeb_0_0"/>
+          <p:cNvSpPr/>
+          <p:nvPr/>
+        </p:nvSpPr>
+        <p:spPr>
+          <a:xfrm>
+            <a:off x="6323030" y="2715645"/>
+            <a:ext cx="457200" cy="457200"/>
+          </a:xfrm>
+          <a:prstGeom prst="roundRect">
+            <a:avLst>
+              <a:gd fmla="val 12000" name="adj"/>
+            </a:avLst>
+          </a:prstGeom>
+          <a:solidFill>
+            <a:srgbClr val="27D3EE">
+              <a:alpha val="20000"/>
+            </a:srgbClr>
+          </a:solidFill>
+          <a:ln cap="flat" cmpd="sng" w="12700">
+            <a:solidFill>
+              <a:srgbClr val="27D3EE"/>
+            </a:solidFill>
+            <a:prstDash val="solid"/>
+            <a:round/>
+            <a:headEnd len="sm" w="sm" type="none"/>
+            <a:tailEnd len="sm" w="sm" type="none"/>
+          </a:ln>
+        </p:spPr>
+        <p:txBody>
+          <a:bodyPr anchorCtr="0" anchor="ctr" bIns="91425" lIns="91425" spcFirstLastPara="1" rIns="91425" wrap="square" tIns="91425">
+            <a:noAutofit/>
+          </a:bodyPr>
+          <a:lstStyle/>
+          <a:p>
+            <a:pPr indent="0" lvl="0" marL="0" rtl="0" algn="l">
+              <a:spcBef>
+                <a:spcPts val="0"/>
+              </a:spcBef>
+              <a:spcAft>
+                <a:spcPts val="0"/>
+              </a:spcAft>
+              <a:buNone/>
+            </a:pPr>
+            <a:r>
+              <a:t/>
+            </a:r>
+            <a:endParaRPr/>
+          </a:p>
+        </p:txBody>
+      </p:sp>
+      <p:sp>
+        <p:nvSpPr>
+          <p:cNvPr id="548" name="Google Shape;548;g3f2dbbdcfeb_0_0"/>
+          <p:cNvSpPr/>
+          <p:nvPr/>
+        </p:nvSpPr>
+        <p:spPr>
+          <a:xfrm>
+            <a:off x="6323030" y="2743070"/>
+            <a:ext cx="457200" cy="457200"/>
+          </a:xfrm>
+          <a:prstGeom prst="rect">
+            <a:avLst/>
+          </a:prstGeom>
+          <a:noFill/>
+          <a:ln>
+            <a:noFill/>
+          </a:ln>
+        </p:spPr>
+        <p:txBody>
+          <a:bodyPr anchorCtr="0" anchor="ctr" bIns="45700" lIns="91425" spcFirstLastPara="1" rIns="91425" wrap="square" tIns="45700">
+            <a:noAutofit/>
+          </a:bodyPr>
+          <a:lstStyle/>
+          <a:p>
+            <a:pPr indent="0" lvl="0" marL="0" marR="0" rtl="0" algn="ctr">
+              <a:spcBef>
+                <a:spcPts val="0"/>
+              </a:spcBef>
+              <a:spcAft>
+                <a:spcPts val="0"/>
+              </a:spcAft>
+              <a:buClr>
+                <a:srgbClr val="6FE4F5"/>
+              </a:buClr>
+              <a:buSzPts val="1600"/>
+              <a:buFont typeface="Malgun Gothic"/>
+              <a:buNone/>
+            </a:pPr>
+            <a:r>
+              <a:rPr b="1" lang="en-US" sz="1600">
+                <a:solidFill>
+                  <a:srgbClr val="6FE4F5"/>
+                </a:solidFill>
+                <a:latin typeface="Malgun Gothic"/>
+                <a:ea typeface="Malgun Gothic"/>
+                <a:cs typeface="Malgun Gothic"/>
+                <a:sym typeface="Malgun Gothic"/>
+              </a:rPr>
+              <a:t>2</a:t>
+            </a:r>
+            <a:endParaRPr b="0" i="0" sz="1600" u="none" cap="none" strike="noStrike">
+              <a:solidFill>
+                <a:schemeClr val="dk1"/>
+              </a:solidFill>
+              <a:latin typeface="Calibri"/>
+              <a:ea typeface="Calibri"/>
+              <a:cs typeface="Calibri"/>
+              <a:sym typeface="Calibri"/>
+            </a:endParaRPr>
+          </a:p>
+        </p:txBody>
+      </p:sp>
+      <p:sp>
+        <p:nvSpPr>
+          <p:cNvPr id="549" name="Google Shape;549;g3f2dbbdcfeb_0_0"/>
+          <p:cNvSpPr/>
+          <p:nvPr/>
+        </p:nvSpPr>
+        <p:spPr>
+          <a:xfrm>
+            <a:off x="6094430" y="2487045"/>
+            <a:ext cx="5349300" cy="1874400"/>
+          </a:xfrm>
+          <a:prstGeom prst="roundRect">
+            <a:avLst>
+              <a:gd fmla="val 4390" name="adj"/>
+            </a:avLst>
+          </a:prstGeom>
+          <a:solidFill>
+            <a:srgbClr val="13253E"/>
+          </a:solidFill>
+          <a:ln cap="flat" cmpd="sng" w="12700">
+            <a:solidFill>
+              <a:srgbClr val="21496E"/>
+            </a:solidFill>
+            <a:prstDash val="solid"/>
+            <a:round/>
+            <a:headEnd len="sm" w="sm" type="none"/>
+            <a:tailEnd len="sm" w="sm" type="none"/>
+          </a:ln>
+          <a:effectLst>
+            <a:outerShdw blurRad="88900" rotWithShape="0" algn="bl" dir="5400000" dist="25400">
+              <a:srgbClr val="000000">
+                <a:alpha val="25099"/>
+              </a:srgbClr>
+            </a:outerShdw>
+          </a:effectLst>
+        </p:spPr>
+        <p:txBody>
+          <a:bodyPr anchorCtr="0" anchor="ctr" bIns="91425" lIns="91425" spcFirstLastPara="1" rIns="91425" wrap="square" tIns="91425">
+            <a:noAutofit/>
+          </a:bodyPr>
+          <a:lstStyle/>
+          <a:p>
+            <a:pPr indent="0" lvl="0" marL="0" rtl="0" algn="l">
+              <a:spcBef>
+                <a:spcPts val="0"/>
+              </a:spcBef>
+              <a:spcAft>
+                <a:spcPts val="0"/>
+              </a:spcAft>
+              <a:buNone/>
+            </a:pPr>
+            <a:r>
+              <a:t/>
+            </a:r>
+            <a:endParaRPr/>
+          </a:p>
+        </p:txBody>
+      </p:sp>
+      <p:sp>
+        <p:nvSpPr>
+          <p:cNvPr id="550" name="Google Shape;550;g3f2dbbdcfeb_0_0"/>
+          <p:cNvSpPr/>
+          <p:nvPr/>
+        </p:nvSpPr>
+        <p:spPr>
+          <a:xfrm>
+            <a:off x="6963110" y="2743077"/>
+            <a:ext cx="4297800" cy="457200"/>
+          </a:xfrm>
+          <a:prstGeom prst="rect">
+            <a:avLst/>
+          </a:prstGeom>
+          <a:noFill/>
+          <a:ln>
+            <a:noFill/>
+          </a:ln>
+        </p:spPr>
+        <p:txBody>
+          <a:bodyPr anchorCtr="0" anchor="ctr" bIns="45700" lIns="91425" spcFirstLastPara="1" rIns="91425" wrap="square" tIns="45700">
+            <a:noAutofit/>
+          </a:bodyPr>
+          <a:lstStyle/>
+          <a:p>
+            <a:pPr indent="0" lvl="0" marL="0" marR="0" rtl="0" algn="l">
+              <a:spcBef>
+                <a:spcPts val="0"/>
+              </a:spcBef>
+              <a:spcAft>
+                <a:spcPts val="0"/>
+              </a:spcAft>
+              <a:buClr>
+                <a:srgbClr val="F5FAFF"/>
+              </a:buClr>
+              <a:buSzPts val="1600"/>
+              <a:buFont typeface="Malgun Gothic"/>
+              <a:buNone/>
+            </a:pPr>
+            <a:r>
+              <a:rPr b="1" lang="en-US" sz="1600">
+                <a:solidFill>
+                  <a:srgbClr val="F5FAFF"/>
+                </a:solidFill>
+                <a:latin typeface="Malgun Gothic"/>
+                <a:ea typeface="Malgun Gothic"/>
+                <a:cs typeface="Malgun Gothic"/>
+                <a:sym typeface="Malgun Gothic"/>
+              </a:rPr>
+              <a:t>낮은 Recall Value</a:t>
+            </a:r>
+            <a:endParaRPr b="0" i="0" sz="1600" u="none" cap="none" strike="noStrike">
+              <a:solidFill>
+                <a:schemeClr val="dk1"/>
+              </a:solidFill>
+              <a:latin typeface="Calibri"/>
+              <a:ea typeface="Calibri"/>
+              <a:cs typeface="Calibri"/>
+              <a:sym typeface="Calibri"/>
+            </a:endParaRPr>
+          </a:p>
+        </p:txBody>
+      </p:sp>
+      <p:sp>
+        <p:nvSpPr>
+          <p:cNvPr id="551" name="Google Shape;551;g3f2dbbdcfeb_0_0"/>
+          <p:cNvSpPr/>
+          <p:nvPr/>
+        </p:nvSpPr>
+        <p:spPr>
+          <a:xfrm>
+            <a:off x="6368750" y="3264225"/>
+            <a:ext cx="4846200" cy="914400"/>
+          </a:xfrm>
+          <a:prstGeom prst="rect">
+            <a:avLst/>
+          </a:prstGeom>
+          <a:noFill/>
+          <a:ln>
+            <a:noFill/>
+          </a:ln>
+        </p:spPr>
+        <p:txBody>
+          <a:bodyPr anchorCtr="0" anchor="ctr" bIns="45700" lIns="91425" spcFirstLastPara="1" rIns="91425" wrap="square" tIns="45700">
+            <a:noAutofit/>
+          </a:bodyPr>
+          <a:lstStyle/>
+          <a:p>
+            <a:pPr indent="0" lvl="0" marL="0" marR="0" rtl="0" algn="l">
+              <a:lnSpc>
+                <a:spcPct val="120000"/>
+              </a:lnSpc>
+              <a:spcBef>
+                <a:spcPts val="0"/>
+              </a:spcBef>
+              <a:spcAft>
+                <a:spcPts val="0"/>
+              </a:spcAft>
+              <a:buClr>
+                <a:srgbClr val="9FB6CE"/>
+              </a:buClr>
+              <a:buSzPts val="1250"/>
+              <a:buFont typeface="Malgun Gothic"/>
+              <a:buNone/>
+            </a:pPr>
+            <a:r>
+              <a:rPr lang="en-US" sz="1250">
+                <a:solidFill>
+                  <a:srgbClr val="9FB6CE"/>
+                </a:solidFill>
+                <a:latin typeface="Malgun Gothic"/>
+                <a:ea typeface="Malgun Gothic"/>
+                <a:cs typeface="Malgun Gothic"/>
+                <a:sym typeface="Malgun Gothic"/>
+              </a:rPr>
+              <a:t>원인 : Loc의 recall 0.79 - 국부 불량의 패턴 다양성 때문</a:t>
+            </a:r>
+            <a:endParaRPr sz="1250">
+              <a:solidFill>
+                <a:srgbClr val="9FB6CE"/>
+              </a:solidFill>
+              <a:latin typeface="Malgun Gothic"/>
+              <a:ea typeface="Malgun Gothic"/>
+              <a:cs typeface="Malgun Gothic"/>
+              <a:sym typeface="Malgun Gothic"/>
+            </a:endParaRPr>
+          </a:p>
+          <a:p>
+            <a:pPr indent="0" lvl="0" marL="0" marR="0" rtl="0" algn="l">
+              <a:lnSpc>
+                <a:spcPct val="120000"/>
+              </a:lnSpc>
+              <a:spcBef>
+                <a:spcPts val="0"/>
+              </a:spcBef>
+              <a:spcAft>
+                <a:spcPts val="0"/>
+              </a:spcAft>
+              <a:buClr>
+                <a:srgbClr val="9FB6CE"/>
+              </a:buClr>
+              <a:buSzPts val="1250"/>
+              <a:buFont typeface="Malgun Gothic"/>
+              <a:buNone/>
+            </a:pPr>
+            <a:r>
+              <a:rPr lang="en-US" sz="1250">
+                <a:solidFill>
+                  <a:srgbClr val="9FB6CE"/>
+                </a:solidFill>
+                <a:latin typeface="Malgun Gothic"/>
+                <a:ea typeface="Malgun Gothic"/>
+                <a:cs typeface="Malgun Gothic"/>
+                <a:sym typeface="Malgun Gothic"/>
+              </a:rPr>
+              <a:t>한계 : 추가 데이터와 고해상도로 개선 여지</a:t>
+            </a:r>
+            <a:endParaRPr sz="1250">
+              <a:solidFill>
+                <a:srgbClr val="9FB6CE"/>
+              </a:solidFill>
+              <a:latin typeface="Malgun Gothic"/>
+              <a:ea typeface="Malgun Gothic"/>
+              <a:cs typeface="Malgun Gothic"/>
+              <a:sym typeface="Malgun Gothic"/>
+            </a:endParaRPr>
+          </a:p>
+        </p:txBody>
+      </p:sp>
+      <p:sp>
+        <p:nvSpPr>
+          <p:cNvPr id="552" name="Google Shape;552;g3f2dbbdcfeb_0_0"/>
+          <p:cNvSpPr/>
+          <p:nvPr/>
+        </p:nvSpPr>
+        <p:spPr>
+          <a:xfrm>
+            <a:off x="658455" y="2487050"/>
+            <a:ext cx="5349300" cy="1874400"/>
+          </a:xfrm>
+          <a:prstGeom prst="roundRect">
+            <a:avLst>
+              <a:gd fmla="val 4390" name="adj"/>
+            </a:avLst>
+          </a:prstGeom>
+          <a:solidFill>
+            <a:srgbClr val="13253E"/>
+          </a:solidFill>
+          <a:ln cap="flat" cmpd="sng" w="12700">
+            <a:solidFill>
+              <a:srgbClr val="21496E"/>
+            </a:solidFill>
+            <a:prstDash val="solid"/>
+            <a:round/>
+            <a:headEnd len="sm" w="sm" type="none"/>
+            <a:tailEnd len="sm" w="sm" type="none"/>
+          </a:ln>
+          <a:effectLst>
+            <a:outerShdw blurRad="88900" rotWithShape="0" algn="bl" dir="5400000" dist="25400">
+              <a:srgbClr val="000000">
+                <a:alpha val="25099"/>
+              </a:srgbClr>
+            </a:outerShdw>
+          </a:effectLst>
+        </p:spPr>
+        <p:txBody>
+          <a:bodyPr anchorCtr="0" anchor="ctr" bIns="91425" lIns="91425" spcFirstLastPara="1" rIns="91425" wrap="square" tIns="91425">
+            <a:noAutofit/>
+          </a:bodyPr>
+          <a:lstStyle/>
+          <a:p>
+            <a:pPr indent="0" lvl="0" marL="0" rtl="0" algn="l">
+              <a:spcBef>
+                <a:spcPts val="0"/>
+              </a:spcBef>
+              <a:spcAft>
+                <a:spcPts val="0"/>
+              </a:spcAft>
+              <a:buNone/>
+            </a:pPr>
+            <a:r>
+              <a:t/>
+            </a:r>
+            <a:endParaRPr/>
+          </a:p>
+        </p:txBody>
+      </p:sp>
+      <p:sp>
+        <p:nvSpPr>
+          <p:cNvPr id="553" name="Google Shape;553;g3f2dbbdcfeb_0_0"/>
+          <p:cNvSpPr/>
+          <p:nvPr/>
+        </p:nvSpPr>
+        <p:spPr>
+          <a:xfrm>
+            <a:off x="1527135" y="2743082"/>
+            <a:ext cx="4297800" cy="457200"/>
+          </a:xfrm>
+          <a:prstGeom prst="rect">
+            <a:avLst/>
+          </a:prstGeom>
+          <a:noFill/>
+          <a:ln>
+            <a:noFill/>
+          </a:ln>
+        </p:spPr>
+        <p:txBody>
+          <a:bodyPr anchorCtr="0" anchor="ctr" bIns="45700" lIns="91425" spcFirstLastPara="1" rIns="91425" wrap="square" tIns="45700">
+            <a:noAutofit/>
+          </a:bodyPr>
+          <a:lstStyle/>
+          <a:p>
+            <a:pPr indent="0" lvl="0" marL="0" marR="0" rtl="0" algn="l">
+              <a:spcBef>
+                <a:spcPts val="0"/>
+              </a:spcBef>
+              <a:spcAft>
+                <a:spcPts val="0"/>
+              </a:spcAft>
+              <a:buClr>
+                <a:srgbClr val="F5FAFF"/>
+              </a:buClr>
+              <a:buSzPts val="1600"/>
+              <a:buFont typeface="Malgun Gothic"/>
+              <a:buNone/>
+            </a:pPr>
+            <a:r>
+              <a:rPr b="1" lang="en-US" sz="1600">
+                <a:solidFill>
+                  <a:srgbClr val="F5FAFF"/>
+                </a:solidFill>
+                <a:latin typeface="Malgun Gothic"/>
+                <a:ea typeface="Malgun Gothic"/>
+                <a:cs typeface="Malgun Gothic"/>
+                <a:sym typeface="Malgun Gothic"/>
+              </a:rPr>
+              <a:t>Data Augmentation</a:t>
+            </a:r>
+            <a:endParaRPr b="0" i="0" sz="1600" u="none" cap="none" strike="noStrike">
+              <a:solidFill>
+                <a:schemeClr val="dk1"/>
+              </a:solidFill>
+              <a:latin typeface="Calibri"/>
+              <a:ea typeface="Calibri"/>
+              <a:cs typeface="Calibri"/>
+              <a:sym typeface="Calibri"/>
+            </a:endParaRPr>
+          </a:p>
+        </p:txBody>
+      </p:sp>
+      <p:sp>
+        <p:nvSpPr>
+          <p:cNvPr id="554" name="Google Shape;554;g3f2dbbdcfeb_0_0"/>
+          <p:cNvSpPr/>
+          <p:nvPr/>
+        </p:nvSpPr>
+        <p:spPr>
+          <a:xfrm>
+            <a:off x="932775" y="3355730"/>
+            <a:ext cx="4846200" cy="822900"/>
+          </a:xfrm>
+          <a:prstGeom prst="rect">
+            <a:avLst/>
+          </a:prstGeom>
+          <a:noFill/>
+          <a:ln>
+            <a:noFill/>
+          </a:ln>
+        </p:spPr>
+        <p:txBody>
+          <a:bodyPr anchorCtr="0" anchor="ctr" bIns="45700" lIns="91425" spcFirstLastPara="1" rIns="91425" wrap="square" tIns="45700">
+            <a:noAutofit/>
+          </a:bodyPr>
+          <a:lstStyle/>
+          <a:p>
+            <a:pPr indent="0" lvl="0" marL="0" marR="0" rtl="0" algn="l">
+              <a:lnSpc>
+                <a:spcPct val="120000"/>
+              </a:lnSpc>
+              <a:spcBef>
+                <a:spcPts val="0"/>
+              </a:spcBef>
+              <a:spcAft>
+                <a:spcPts val="0"/>
+              </a:spcAft>
+              <a:buClr>
+                <a:srgbClr val="9FB6CE"/>
+              </a:buClr>
+              <a:buSzPts val="1250"/>
+              <a:buFont typeface="Malgun Gothic"/>
+              <a:buNone/>
+            </a:pPr>
+            <a:r>
+              <a:rPr lang="en-US" sz="1250">
+                <a:solidFill>
+                  <a:srgbClr val="9FB6CE"/>
+                </a:solidFill>
+                <a:latin typeface="Malgun Gothic"/>
+                <a:ea typeface="Malgun Gothic"/>
+                <a:cs typeface="Malgun Gothic"/>
+                <a:sym typeface="Malgun Gothic"/>
+              </a:rPr>
+              <a:t>원인 : RandomZoom 사용시 웨이퍼의 가장자리가 잘리는 이슈</a:t>
+            </a:r>
+            <a:endParaRPr sz="1250">
+              <a:solidFill>
+                <a:srgbClr val="9FB6CE"/>
+              </a:solidFill>
+              <a:latin typeface="Malgun Gothic"/>
+              <a:ea typeface="Malgun Gothic"/>
+              <a:cs typeface="Malgun Gothic"/>
+              <a:sym typeface="Malgun Gothic"/>
+            </a:endParaRPr>
+          </a:p>
+          <a:p>
+            <a:pPr indent="0" lvl="0" marL="0" marR="0" rtl="0" algn="l">
+              <a:lnSpc>
+                <a:spcPct val="120000"/>
+              </a:lnSpc>
+              <a:spcBef>
+                <a:spcPts val="0"/>
+              </a:spcBef>
+              <a:spcAft>
+                <a:spcPts val="0"/>
+              </a:spcAft>
+              <a:buClr>
+                <a:srgbClr val="9FB6CE"/>
+              </a:buClr>
+              <a:buSzPts val="1250"/>
+              <a:buFont typeface="Malgun Gothic"/>
+              <a:buNone/>
+            </a:pPr>
+            <a:r>
+              <a:rPr lang="en-US" sz="1250">
+                <a:solidFill>
+                  <a:srgbClr val="9FB6CE"/>
+                </a:solidFill>
+                <a:latin typeface="Malgun Gothic"/>
+                <a:ea typeface="Malgun Gothic"/>
+                <a:cs typeface="Malgun Gothic"/>
+                <a:sym typeface="Malgun Gothic"/>
+              </a:rPr>
+              <a:t>해결 : RandomRotation(0.1), RandomFlip만 사용</a:t>
+            </a:r>
+            <a:endParaRPr sz="1250">
+              <a:solidFill>
+                <a:srgbClr val="9FB6CE"/>
+              </a:solidFill>
+              <a:latin typeface="Malgun Gothic"/>
+              <a:ea typeface="Malgun Gothic"/>
+              <a:cs typeface="Malgun Gothic"/>
+              <a:sym typeface="Malgun Gothic"/>
+            </a:endParaRPr>
+          </a:p>
+        </p:txBody>
+      </p:sp>
+      <p:sp>
+        <p:nvSpPr>
+          <p:cNvPr id="555" name="Google Shape;555;g3f2dbbdcfeb_0_0"/>
+          <p:cNvSpPr/>
+          <p:nvPr/>
+        </p:nvSpPr>
+        <p:spPr>
+          <a:xfrm>
+            <a:off x="6323030" y="2743075"/>
+            <a:ext cx="457200" cy="457200"/>
+          </a:xfrm>
+          <a:prstGeom prst="roundRect">
+            <a:avLst>
+              <a:gd fmla="val 12000" name="adj"/>
+            </a:avLst>
+          </a:prstGeom>
+          <a:solidFill>
+            <a:srgbClr val="27D3EE">
+              <a:alpha val="20000"/>
+            </a:srgbClr>
+          </a:solidFill>
+          <a:ln cap="flat" cmpd="sng" w="12700">
+            <a:solidFill>
+              <a:srgbClr val="27D3EE"/>
+            </a:solidFill>
+            <a:prstDash val="solid"/>
+            <a:round/>
+            <a:headEnd len="sm" w="sm" type="none"/>
+            <a:tailEnd len="sm" w="sm" type="none"/>
+          </a:ln>
+        </p:spPr>
+        <p:txBody>
+          <a:bodyPr anchorCtr="0" anchor="ctr" bIns="91425" lIns="91425" spcFirstLastPara="1" rIns="91425" wrap="square" tIns="91425">
+            <a:noAutofit/>
+          </a:bodyPr>
+          <a:lstStyle/>
+          <a:p>
+            <a:pPr indent="0" lvl="0" marL="0" rtl="0" algn="l">
+              <a:spcBef>
+                <a:spcPts val="0"/>
+              </a:spcBef>
+              <a:spcAft>
+                <a:spcPts val="0"/>
+              </a:spcAft>
+              <a:buNone/>
+            </a:pPr>
+            <a:r>
+              <a:t/>
+            </a:r>
+            <a:endParaRPr/>
+          </a:p>
+        </p:txBody>
+      </p:sp>
+      <p:sp>
+        <p:nvSpPr>
+          <p:cNvPr id="556" name="Google Shape;556;g3f2dbbdcfeb_0_0"/>
+          <p:cNvSpPr/>
+          <p:nvPr/>
+        </p:nvSpPr>
+        <p:spPr>
+          <a:xfrm>
+            <a:off x="6323030" y="2715645"/>
+            <a:ext cx="457200" cy="457200"/>
+          </a:xfrm>
+          <a:prstGeom prst="rect">
+            <a:avLst/>
+          </a:prstGeom>
+          <a:noFill/>
+          <a:ln>
+            <a:noFill/>
+          </a:ln>
+        </p:spPr>
+        <p:txBody>
+          <a:bodyPr anchorCtr="0" anchor="ctr" bIns="45700" lIns="91425" spcFirstLastPara="1" rIns="91425" wrap="square" tIns="45700">
+            <a:noAutofit/>
+          </a:bodyPr>
+          <a:lstStyle/>
+          <a:p>
+            <a:pPr indent="0" lvl="0" marL="0" marR="0" rtl="0" algn="ctr">
+              <a:spcBef>
+                <a:spcPts val="0"/>
+              </a:spcBef>
+              <a:spcAft>
+                <a:spcPts val="0"/>
+              </a:spcAft>
+              <a:buClr>
+                <a:srgbClr val="6FE4F5"/>
+              </a:buClr>
+              <a:buSzPts val="1600"/>
+              <a:buFont typeface="Malgun Gothic"/>
+              <a:buNone/>
+            </a:pPr>
+            <a:r>
+              <a:rPr b="1" lang="en-US" sz="1600">
+                <a:solidFill>
+                  <a:srgbClr val="6FE4F5"/>
+                </a:solidFill>
+                <a:latin typeface="Malgun Gothic"/>
+                <a:ea typeface="Malgun Gothic"/>
+                <a:cs typeface="Malgun Gothic"/>
+                <a:sym typeface="Malgun Gothic"/>
+              </a:rPr>
+              <a:t>2</a:t>
+            </a:r>
+            <a:endParaRPr b="0" i="0" sz="1600" u="none" cap="none" strike="noStrike">
+              <a:solidFill>
+                <a:schemeClr val="dk1"/>
+              </a:solidFill>
+              <a:latin typeface="Calibri"/>
+              <a:ea typeface="Calibri"/>
+              <a:cs typeface="Calibri"/>
+              <a:sym typeface="Calibri"/>
+            </a:endParaRPr>
+          </a:p>
+        </p:txBody>
+      </p:sp>
+      <p:sp>
+        <p:nvSpPr>
+          <p:cNvPr id="557" name="Google Shape;557;g3f2dbbdcfeb_0_0"/>
+          <p:cNvSpPr/>
+          <p:nvPr/>
+        </p:nvSpPr>
+        <p:spPr>
+          <a:xfrm>
+            <a:off x="887055" y="2715650"/>
+            <a:ext cx="457200" cy="457200"/>
+          </a:xfrm>
+          <a:prstGeom prst="rect">
+            <a:avLst/>
+          </a:prstGeom>
+          <a:noFill/>
+          <a:ln>
+            <a:noFill/>
+          </a:ln>
+        </p:spPr>
+        <p:txBody>
+          <a:bodyPr anchorCtr="0" anchor="ctr" bIns="45700" lIns="91425" spcFirstLastPara="1" rIns="91425" wrap="square" tIns="45700">
+            <a:noAutofit/>
+          </a:bodyPr>
+          <a:lstStyle/>
+          <a:p>
+            <a:pPr indent="0" lvl="0" marL="0" marR="0" rtl="0" algn="ctr">
+              <a:spcBef>
+                <a:spcPts val="0"/>
+              </a:spcBef>
+              <a:spcAft>
+                <a:spcPts val="0"/>
+              </a:spcAft>
+              <a:buClr>
+                <a:srgbClr val="6FE4F5"/>
+              </a:buClr>
+              <a:buSzPts val="1600"/>
+              <a:buFont typeface="Malgun Gothic"/>
+              <a:buNone/>
+            </a:pPr>
+            <a:r>
+              <a:rPr b="1" i="0" lang="en-US" sz="1600" u="none" cap="none" strike="noStrike">
+                <a:solidFill>
+                  <a:srgbClr val="6FE4F5"/>
+                </a:solidFill>
+                <a:latin typeface="Malgun Gothic"/>
+                <a:ea typeface="Malgun Gothic"/>
+                <a:cs typeface="Malgun Gothic"/>
+                <a:sym typeface="Malgun Gothic"/>
+              </a:rPr>
+              <a:t>1</a:t>
+            </a:r>
+            <a:endParaRPr b="0" i="0" sz="1600" u="none" cap="none" strike="noStrike">
+              <a:solidFill>
+                <a:schemeClr val="dk1"/>
+              </a:solidFill>
+              <a:latin typeface="Calibri"/>
+              <a:ea typeface="Calibri"/>
+              <a:cs typeface="Calibri"/>
+              <a:sym typeface="Calibri"/>
+            </a:endParaRPr>
+          </a:p>
+        </p:txBody>
+      </p:sp>
+      <p:sp>
+        <p:nvSpPr>
+          <p:cNvPr id="558" name="Google Shape;558;g3f2dbbdcfeb_0_0"/>
+          <p:cNvSpPr/>
+          <p:nvPr/>
+        </p:nvSpPr>
+        <p:spPr>
+          <a:xfrm>
+            <a:off x="872349" y="2688200"/>
+            <a:ext cx="486600" cy="512100"/>
+          </a:xfrm>
+          <a:prstGeom prst="roundRect">
+            <a:avLst>
+              <a:gd fmla="val 12000" name="adj"/>
+            </a:avLst>
+          </a:prstGeom>
+          <a:solidFill>
+            <a:srgbClr val="27D3EE">
+              <a:alpha val="20000"/>
+            </a:srgbClr>
+          </a:solidFill>
+          <a:ln cap="flat" cmpd="sng" w="12700">
+            <a:solidFill>
+              <a:srgbClr val="27D3EE"/>
+            </a:solidFill>
+            <a:prstDash val="solid"/>
+            <a:round/>
+            <a:headEnd len="sm" w="sm" type="none"/>
+            <a:tailEnd len="sm" w="sm" type="none"/>
+          </a:ln>
+        </p:spPr>
+        <p:txBody>
+          <a:bodyPr anchorCtr="0" anchor="ctr" bIns="91425" lIns="91425" spcFirstLastPara="1" rIns="91425" wrap="square" tIns="91425">
+            <a:noAutofit/>
+          </a:bodyPr>
+          <a:lstStyle/>
+          <a:p>
+            <a:pPr indent="0" lvl="0" marL="0" rtl="0" algn="l">
+              <a:spcBef>
+                <a:spcPts val="0"/>
+              </a:spcBef>
+              <a:spcAft>
+                <a:spcPts val="0"/>
+              </a:spcAft>
+              <a:buNone/>
+            </a:pPr>
+            <a:r>
+              <a:t/>
+            </a:r>
+            <a:endParaRPr/>
+          </a:p>
+        </p:txBody>
+      </p:sp>
+    </p:spTree>
+  </p:cSld>
+  <p:clrMapOvr>
+    <a:masterClrMapping/>
+  </p:clrMapOvr>
+</p:sld>
+</file>
+
+<file path=ppt/slides/slide18.xml><?xml version="1.0" encoding="utf-8"?>
+<p:sld xmlns:a="http://schemas.openxmlformats.org/drawingml/2006/main" xmlns:r="http://schemas.openxmlformats.org/officeDocument/2006/relationships" xmlns:mc="http://schemas.openxmlformats.org/markup-compatibility/2006" xmlns:mv="urn:schemas-microsoft-com:mac:vml" xmlns:p="http://schemas.openxmlformats.org/presentationml/2006/main" xmlns:c="http://schemas.openxmlformats.org/drawingml/2006/chart" xmlns:dgm="http://schemas.openxmlformats.org/drawingml/2006/diagram" xmlns:o="urn:schemas-microsoft-com:office:office" xmlns:v="urn:schemas-microsoft-com:vml" xmlns:pvml="urn:schemas-microsoft-com:office:powerpoint" xmlns:com="http://schemas.openxmlformats.org/drawingml/2006/compatibility" xmlns:p14="http://schemas.microsoft.com/office/powerpoint/2010/main" xmlns:p15="http://schemas.microsoft.com/office/powerpoint/2012/main" xmlns:ahyp="http://schemas.microsoft.com/office/drawing/2018/hyperlinkcolor">
+  <p:cSld>
+    <p:bg>
+      <p:bgPr>
+        <a:solidFill>
+          <a:srgbClr val="0B1A2E"/>
+        </a:solidFill>
+      </p:bgPr>
+    </p:bg>
+    <p:spTree>
+      <p:nvGrpSpPr>
+        <p:cNvPr id="563" name="Shape 563"/>
+        <p:cNvGrpSpPr/>
+        <p:nvPr/>
+      </p:nvGrpSpPr>
+      <p:grpSpPr>
+        <a:xfrm>
+          <a:off x="0" y="0"/>
+          <a:ext cx="0" cy="0"/>
+          <a:chOff x="0" y="0"/>
+          <a:chExt cx="0" cy="0"/>
+        </a:xfrm>
+      </p:grpSpPr>
+      <p:sp>
+        <p:nvSpPr>
+          <p:cNvPr id="564" name="Google Shape;564;p18"/>
           <p:cNvSpPr/>
           <p:nvPr/>
         </p:nvSpPr>
@@ -13432,7 +15097,7 @@
       </p:sp>
       <p:sp>
         <p:nvSpPr>
-          <p:cNvPr id="535" name="Google Shape;535;p18"/>
+          <p:cNvPr id="565" name="Google Shape;565;p18"/>
           <p:cNvSpPr/>
           <p:nvPr/>
         </p:nvSpPr>
@@ -13485,7 +15150,7 @@
       </p:sp>
       <p:cxnSp>
         <p:nvCxnSpPr>
-          <p:cNvPr id="536" name="Google Shape;536;p18"/>
+          <p:cNvPr id="566" name="Google Shape;566;p18"/>
           <p:cNvCxnSpPr/>
           <p:nvPr/>
         </p:nvCxnSpPr>
@@ -13513,7 +15178,7 @@
       </p:cxnSp>
       <p:cxnSp>
         <p:nvCxnSpPr>
-          <p:cNvPr id="537" name="Google Shape;537;p18"/>
+          <p:cNvPr id="567" name="Google Shape;567;p18"/>
           <p:cNvCxnSpPr/>
           <p:nvPr/>
         </p:nvCxnSpPr>
@@ -13541,7 +15206,7 @@
       </p:cxnSp>
       <p:sp>
         <p:nvSpPr>
-          <p:cNvPr id="538" name="Google Shape;538;p18"/>
+          <p:cNvPr id="568" name="Google Shape;568;p18"/>
           <p:cNvSpPr/>
           <p:nvPr/>
         </p:nvSpPr>
@@ -13602,7 +15267,7 @@
       </p:sp>
       <p:cxnSp>
         <p:nvCxnSpPr>
-          <p:cNvPr id="539" name="Google Shape;539;p18"/>
+          <p:cNvPr id="569" name="Google Shape;569;p18"/>
           <p:cNvCxnSpPr/>
           <p:nvPr/>
         </p:nvCxnSpPr>
@@ -13630,7 +15295,7 @@
       </p:cxnSp>
       <p:cxnSp>
         <p:nvCxnSpPr>
-          <p:cNvPr id="540" name="Google Shape;540;p18"/>
+          <p:cNvPr id="570" name="Google Shape;570;p18"/>
           <p:cNvCxnSpPr/>
           <p:nvPr/>
         </p:nvCxnSpPr>
@@ -13658,7 +15323,7 @@
       </p:cxnSp>
       <p:cxnSp>
         <p:nvCxnSpPr>
-          <p:cNvPr id="541" name="Google Shape;541;p18"/>
+          <p:cNvPr id="571" name="Google Shape;571;p18"/>
           <p:cNvCxnSpPr/>
           <p:nvPr/>
         </p:nvCxnSpPr>
@@ -13686,7 +15351,7 @@
       </p:cxnSp>
       <p:sp>
         <p:nvSpPr>
-          <p:cNvPr id="542" name="Google Shape;542;p18"/>
+          <p:cNvPr id="572" name="Google Shape;572;p18"/>
           <p:cNvSpPr/>
           <p:nvPr/>
         </p:nvSpPr>
@@ -13747,7 +15412,7 @@
       </p:sp>
       <p:pic>
         <p:nvPicPr>
-          <p:cNvPr descr="assets/hero.png" id="543" name="Google Shape;543;p18"/>
+          <p:cNvPr descr="assets/hero.png" id="573" name="Google Shape;573;p18"/>
           <p:cNvPicPr preferRelativeResize="0"/>
           <p:nvPr/>
         </p:nvPicPr>
@@ -13774,7 +15439,7 @@
       </p:pic>
       <p:sp>
         <p:nvSpPr>
-          <p:cNvPr id="544" name="Google Shape;544;p18"/>
+          <p:cNvPr id="574" name="Google Shape;574;p18"/>
           <p:cNvSpPr/>
           <p:nvPr/>
         </p:nvSpPr>
@@ -13837,7 +15502,7 @@
       </p:sp>
       <p:sp>
         <p:nvSpPr>
-          <p:cNvPr id="545" name="Google Shape;545;p18"/>
+          <p:cNvPr id="575" name="Google Shape;575;p18"/>
           <p:cNvSpPr/>
           <p:nvPr/>
         </p:nvSpPr>
@@ -13900,7 +15565,7 @@
       </p:sp>
       <p:cxnSp>
         <p:nvCxnSpPr>
-          <p:cNvPr id="546" name="Google Shape;546;p18"/>
+          <p:cNvPr id="576" name="Google Shape;576;p18"/>
           <p:cNvCxnSpPr/>
           <p:nvPr/>
         </p:nvCxnSpPr>
@@ -13926,7 +15591,7 @@
       </p:cxnSp>
       <p:sp>
         <p:nvSpPr>
-          <p:cNvPr id="547" name="Google Shape;547;p18"/>
+          <p:cNvPr id="577" name="Google Shape;577;p18"/>
           <p:cNvSpPr/>
           <p:nvPr/>
         </p:nvSpPr>
@@ -13989,7 +15654,7 @@
       </p:sp>
       <p:sp>
         <p:nvSpPr>
-          <p:cNvPr id="548" name="Google Shape;548;p18"/>
+          <p:cNvPr id="578" name="Google Shape;578;p18"/>
           <p:cNvSpPr/>
           <p:nvPr/>
         </p:nvSpPr>
